--- a/docs/Resilient_Compiler_Phase3_Presentation.pptx
+++ b/docs/Resilient_Compiler_Phase3_Presentation.pptx
@@ -4995,6 +4995,15 @@
             </a:pPr>
             <a:r>
               <a:t>Complete deliverables: resilientc.exe, academic report, complete explanation, web studio, 20/20 test suite.</a:t>
+            </a:r>
+            <a:br/>
+            <a:br/>
+            <a:r>
+              <a:t>Official GitHub Repository:</a:t>
+            </a:r>
+            <a:br/>
+            <a:r>
+              <a:t>https://github.com/joshuadjd79-cmd/resilient-compiler-intelligent-error-recovery</a:t>
             </a:r>
           </a:p>
         </p:txBody>

--- a/docs/Resilient_Compiler_Phase3_Presentation.pptx
+++ b/docs/Resilient_Compiler_Phase3_Presentation.pptx
@@ -3297,7 +3297,7 @@
               </a:defRPr>
             </a:pPr>
             <a:r>
-              <a:t>Course: Compiler Design Laboratory (CSE3002)</a:t>
+              <a:t>Course: Compiler Design (BCSE302L)</a:t>
             </a:r>
           </a:p>
         </p:txBody>
